--- a/production/releases/chapter-03/03-ch3-energy-speed-slides.pptx
+++ b/production/releases/chapter-03/03-ch3-energy-speed-slides.pptx
@@ -47,7 +47,7 @@
     <p:sldId id="295" r:id="rId47"/>
     <p:sldId id="296" r:id="rId48"/>
   </p:sldIdLst>
-  <p:sldSz cx="12191695" cy="6858000" type="screen4x3"/>
+  <p:sldSz cx="12191695" cy="6858000" type="screen16x9"/>
   <p:notesSz cx="6858000" cy="9144000"/>
   <p:defaultTextStyle>
     <a:defPPr>
